--- a/1a_Data Science and AI-Python.pptx
+++ b/1a_Data Science and AI-Python.pptx
@@ -1835,7 +1835,7 @@
           <a:p>
             <a:fld id="{A07EBC51-FBD1-4402-994F-30887AF72F43}" type="datetimeFigureOut">
               <a:rPr lang="en-US" smtClean="0"/>
-              <a:t>2/27/2025</a:t>
+              <a:t>4/7/2025</a:t>
             </a:fld>
             <a:endParaRPr lang="en-US"/>
           </a:p>
@@ -2988,7 +2988,7 @@
           <a:p>
             <a:fld id="{FD6C8CAD-B077-417F-9CA6-ACE3DD7FAA77}" type="datetime1">
               <a:rPr lang="en-US" smtClean="0"/>
-              <a:t>2/27/2025</a:t>
+              <a:t>4/7/2025</a:t>
             </a:fld>
             <a:endParaRPr lang="en-US"/>
           </a:p>
@@ -3297,7 +3297,7 @@
           <a:p>
             <a:fld id="{C878509E-D29B-4E1D-AD82-F1022683087A}" type="datetime1">
               <a:rPr lang="en-US" smtClean="0"/>
-              <a:t>2/27/2025</a:t>
+              <a:t>4/7/2025</a:t>
             </a:fld>
             <a:endParaRPr lang="en-US"/>
           </a:p>
@@ -3505,7 +3505,7 @@
           <a:p>
             <a:fld id="{8E7503B4-8857-45D2-A9BC-FE3090308513}" type="datetime1">
               <a:rPr lang="en-US" smtClean="0"/>
-              <a:t>2/27/2025</a:t>
+              <a:t>4/7/2025</a:t>
             </a:fld>
             <a:endParaRPr lang="en-US"/>
           </a:p>
@@ -3924,7 +3924,7 @@
           <a:p>
             <a:fld id="{DBB32362-B66B-451C-84DB-81320B8D3CC4}" type="datetime1">
               <a:rPr lang="en-US" smtClean="0"/>
-              <a:t>2/27/2025</a:t>
+              <a:t>4/7/2025</a:t>
             </a:fld>
             <a:endParaRPr lang="en-US" dirty="0"/>
           </a:p>
@@ -4199,7 +4199,7 @@
           <a:p>
             <a:fld id="{7C5F1058-21D7-4AF6-A63D-BC53DBDF414E}" type="datetime1">
               <a:rPr lang="en-US" smtClean="0"/>
-              <a:t>2/27/2025</a:t>
+              <a:t>4/7/2025</a:t>
             </a:fld>
             <a:endParaRPr lang="en-US"/>
           </a:p>
@@ -4464,7 +4464,7 @@
           <a:p>
             <a:fld id="{1FCC9E0C-5BE0-4EF5-ACF1-25586ED69853}" type="datetime1">
               <a:rPr lang="en-US" smtClean="0"/>
-              <a:t>2/27/2025</a:t>
+              <a:t>4/7/2025</a:t>
             </a:fld>
             <a:endParaRPr lang="en-US"/>
           </a:p>
@@ -4876,7 +4876,7 @@
           <a:p>
             <a:fld id="{C0B420FA-874E-41F8-AED2-F061B1D6B7CB}" type="datetime1">
               <a:rPr lang="en-US" smtClean="0"/>
-              <a:t>2/27/2025</a:t>
+              <a:t>4/7/2025</a:t>
             </a:fld>
             <a:endParaRPr lang="en-US"/>
           </a:p>
@@ -5017,7 +5017,7 @@
           <a:p>
             <a:fld id="{467BCC0A-7F10-4B12-884D-ACD4DB04207D}" type="datetime1">
               <a:rPr lang="en-US" smtClean="0"/>
-              <a:t>2/27/2025</a:t>
+              <a:t>4/7/2025</a:t>
             </a:fld>
             <a:endParaRPr lang="en-US"/>
           </a:p>
@@ -5130,7 +5130,7 @@
           <a:p>
             <a:fld id="{76B95B5D-F9E1-455B-BD21-FE0CDC427291}" type="datetime1">
               <a:rPr lang="en-US" smtClean="0"/>
-              <a:t>2/27/2025</a:t>
+              <a:t>4/7/2025</a:t>
             </a:fld>
             <a:endParaRPr lang="en-US"/>
           </a:p>
@@ -5441,7 +5441,7 @@
           <a:p>
             <a:fld id="{CF3EBDD2-FCE1-424C-AFF3-9FC8AC3DEBFC}" type="datetime1">
               <a:rPr lang="en-US" smtClean="0"/>
-              <a:t>2/27/2025</a:t>
+              <a:t>4/7/2025</a:t>
             </a:fld>
             <a:endParaRPr lang="en-US"/>
           </a:p>
@@ -5729,7 +5729,7 @@
           <a:p>
             <a:fld id="{03BF0772-EB44-476C-9468-E9DE119F3688}" type="datetime1">
               <a:rPr lang="en-US" smtClean="0"/>
-              <a:t>2/27/2025</a:t>
+              <a:t>4/7/2025</a:t>
             </a:fld>
             <a:endParaRPr lang="en-US"/>
           </a:p>
@@ -5970,7 +5970,7 @@
           <a:p>
             <a:fld id="{CF938BB5-9894-43C9-8B49-6950B2F77090}" type="datetime1">
               <a:rPr lang="en-US" smtClean="0"/>
-              <a:t>2/27/2025</a:t>
+              <a:t>4/7/2025</a:t>
             </a:fld>
             <a:endParaRPr lang="en-US"/>
           </a:p>
@@ -10493,15 +10493,6 @@
             <a:pPr lvl="1"/>
             <a:endParaRPr lang="en-US" dirty="0"/>
           </a:p>
-          <a:p>
-            <a:r>
-              <a:rPr lang="en-US" dirty="0"/>
-              <a:t>Anaconda 2024 is on DOE’s EITS pre-approved software list.</a:t>
-            </a:r>
-          </a:p>
-          <a:p>
-            <a:endParaRPr lang="en-US" dirty="0"/>
-          </a:p>
         </p:txBody>
       </p:sp>
     </p:spTree>
@@ -10721,8 +10712,8 @@
         </p:nvSpPr>
         <p:spPr>
           <a:xfrm>
-            <a:off x="311150" y="365126"/>
-            <a:ext cx="6616700" cy="1325563"/>
+            <a:off x="311149" y="365127"/>
+            <a:ext cx="8521699" cy="692814"/>
           </a:xfrm>
         </p:spPr>
         <p:txBody>
@@ -14879,8 +14870,8 @@
         </p:nvSpPr>
         <p:spPr>
           <a:xfrm>
-            <a:off x="311150" y="365126"/>
-            <a:ext cx="6616700" cy="1142127"/>
+            <a:off x="311149" y="365126"/>
+            <a:ext cx="8521700" cy="730027"/>
           </a:xfrm>
         </p:spPr>
         <p:txBody>
@@ -16782,7 +16773,7 @@
                     <a:p>
                       <a:pPr marL="0" marR="0"/>
                       <a:r>
-                        <a:rPr lang="en-US" sz="1000">
+                        <a:rPr lang="en-US" sz="1000" dirty="0">
                           <a:solidFill>
                             <a:srgbClr val="000000"/>
                           </a:solidFill>
